--- a/number 2.pptx
+++ b/number 2.pptx
@@ -6368,8 +6368,8 @@
         </p:blipFill>
         <p:spPr>
           <a:xfrm>
-            <a:off x="3701142" y="1690688"/>
-            <a:ext cx="8490858" cy="1633682"/>
+            <a:off x="4645620" y="1580050"/>
+            <a:ext cx="7698779" cy="1481282"/>
           </a:xfrm>
           <a:prstGeom prst="rect">
             <a:avLst/>
